--- a/LIFE INSURANCE DATABASE PRESENTATION.pptx
+++ b/LIFE INSURANCE DATABASE PRESENTATION.pptx
@@ -5,7 +5,7 @@
     <p:sldMasterId id="2147483648" r:id="rId1"/>
   </p:sldMasterIdLst>
   <p:notesMasterIdLst>
-    <p:notesMasterId r:id="rId8"/>
+    <p:notesMasterId r:id="rId9"/>
   </p:notesMasterIdLst>
   <p:sldIdLst>
     <p:sldId id="256" r:id="rId2"/>
@@ -14,6 +14,7 @@
     <p:sldId id="259" r:id="rId5"/>
     <p:sldId id="260" r:id="rId6"/>
     <p:sldId id="261" r:id="rId7"/>
+    <p:sldId id="262" r:id="rId8"/>
   </p:sldIdLst>
   <p:sldSz cx="9144000" cy="5143500" type="screen16x9"/>
   <p:notesSz cx="5143500" cy="9144000"/>
@@ -1745,6 +1746,14 @@
   <p:clrMapOvr>
     <a:masterClrMapping/>
   </p:clrMapOvr>
+  <mc:AlternateContent xmlns:mc="http://schemas.openxmlformats.org/markup-compatibility/2006" xmlns:p14="http://schemas.microsoft.com/office/powerpoint/2010/main">
+    <mc:Choice Requires="p14">
+      <p:transition spd="slow" p14:dur="2000" advTm="32766"/>
+    </mc:Choice>
+    <mc:Fallback xmlns="">
+      <p:transition spd="slow" advTm="32766"/>
+    </mc:Fallback>
+  </mc:AlternateContent>
 </p:sld>
 </file>
 
@@ -1893,6 +1902,13 @@
             </a:outerShdw>
           </a:effectLst>
         </p:spPr>
+        <p:txBody>
+          <a:bodyPr/>
+          <a:lstStyle/>
+          <a:p>
+            <a:endParaRPr lang="en-US" dirty="0"/>
+          </a:p>
+        </p:txBody>
       </p:sp>
       <p:sp>
         <p:nvSpPr>
@@ -1940,33 +1956,212 @@
           <a:bodyPr wrap="square" rtlCol="0" anchor="ctr"/>
           <a:lstStyle/>
           <a:p>
+            <a:pPr marL="285750" indent="-285750">
+              <a:buFont typeface="Wingdings" panose="05000000000000000000" pitchFamily="2" charset="2"/>
+              <a:buChar char="q"/>
+            </a:pPr>
+            <a:r>
+              <a:rPr lang="en-US" sz="1400" b="1" dirty="0"/>
+              <a:t>DEFINITION</a:t>
+            </a:r>
+          </a:p>
+        </p:txBody>
+      </p:sp>
+      <p:sp>
+        <p:nvSpPr>
+          <p:cNvPr id="8" name="Text 6"/>
+          <p:cNvSpPr/>
+          <p:nvPr/>
+        </p:nvSpPr>
+        <p:spPr>
+          <a:xfrm>
+            <a:off x="502920" y="1499615"/>
+            <a:ext cx="4663440" cy="733631"/>
+          </a:xfrm>
+          <a:prstGeom prst="rect">
+            <a:avLst/>
+          </a:prstGeom>
+          <a:noFill/>
+          <a:ln/>
+        </p:spPr>
+        <p:txBody>
+          <a:bodyPr wrap="square" rtlCol="0" anchor="ctr"/>
+          <a:lstStyle/>
+          <a:p>
+            <a:pPr marL="0" indent="0">
+              <a:lnSpc>
+                <a:spcPct val="130000"/>
+              </a:lnSpc>
+              <a:buNone/>
+            </a:pPr>
+            <a:r>
+              <a:rPr lang="en-US" sz="1100" dirty="0"/>
+              <a:t>The life insurance database management system is a software designed to manage policyholders, insurance policies, premium payments, claims, and agents efficiently.</a:t>
+            </a:r>
+          </a:p>
+          <a:p>
+            <a:pPr marL="0" indent="0">
+              <a:lnSpc>
+                <a:spcPct val="130000"/>
+              </a:lnSpc>
+              <a:buNone/>
+            </a:pPr>
+            <a:endParaRPr lang="en-US" sz="1100" dirty="0"/>
+          </a:p>
+        </p:txBody>
+      </p:sp>
+      <p:sp>
+        <p:nvSpPr>
+          <p:cNvPr id="9" name="Shape 7"/>
+          <p:cNvSpPr/>
+          <p:nvPr/>
+        </p:nvSpPr>
+        <p:spPr>
+          <a:xfrm>
+            <a:off x="320040" y="2377440"/>
+            <a:ext cx="5029200" cy="1115568"/>
+          </a:xfrm>
+          <a:prstGeom prst="rect">
+            <a:avLst/>
+          </a:prstGeom>
+          <a:solidFill>
+            <a:srgbClr val="FFFFFF"/>
+          </a:solidFill>
+          <a:ln w="12700">
+            <a:solidFill>
+              <a:srgbClr val="E2EAF0"/>
+            </a:solidFill>
+            <a:prstDash val="solid"/>
+          </a:ln>
+          <a:effectLst>
+            <a:outerShdw blurRad="101600" dist="38100" dir="8100000" algn="bl" rotWithShape="0">
+              <a:srgbClr val="000000">
+                <a:alpha val="15000"/>
+              </a:srgbClr>
+            </a:outerShdw>
+          </a:effectLst>
+        </p:spPr>
+        <p:txBody>
+          <a:bodyPr/>
+          <a:lstStyle/>
+          <a:p>
+            <a:endParaRPr lang="en-US" dirty="0"/>
+          </a:p>
+        </p:txBody>
+      </p:sp>
+      <p:sp>
+        <p:nvSpPr>
+          <p:cNvPr id="10" name="Shape 8"/>
+          <p:cNvSpPr/>
+          <p:nvPr/>
+        </p:nvSpPr>
+        <p:spPr>
+          <a:xfrm>
+            <a:off x="320040" y="2377440"/>
+            <a:ext cx="73152" cy="1115568"/>
+          </a:xfrm>
+          <a:prstGeom prst="rect">
+            <a:avLst/>
+          </a:prstGeom>
+          <a:solidFill>
+            <a:srgbClr val="028090"/>
+          </a:solidFill>
+          <a:ln w="12700">
+            <a:solidFill>
+              <a:srgbClr val="028090"/>
+            </a:solidFill>
+            <a:prstDash val="solid"/>
+          </a:ln>
+        </p:spPr>
+      </p:sp>
+      <p:sp>
+        <p:nvSpPr>
+          <p:cNvPr id="11" name="Text 9"/>
+          <p:cNvSpPr/>
+          <p:nvPr/>
+        </p:nvSpPr>
+        <p:spPr>
+          <a:xfrm>
+            <a:off x="502920" y="2377440"/>
+            <a:ext cx="4663440" cy="1115568"/>
+          </a:xfrm>
+          <a:prstGeom prst="rect">
+            <a:avLst/>
+          </a:prstGeom>
+          <a:noFill/>
+          <a:ln/>
+        </p:spPr>
+        <p:txBody>
+          <a:bodyPr wrap="square" rtlCol="0" anchor="ctr"/>
+          <a:lstStyle/>
+          <a:p>
             <a:pPr marL="0" indent="0">
               <a:buNone/>
             </a:pPr>
             <a:r>
-              <a:rPr lang="en-US" sz="1300" b="1" dirty="0">
-                <a:solidFill>
-                  <a:srgbClr val="0D1B3E"/>
-                </a:solidFill>
-                <a:latin typeface="Calibri" pitchFamily="34" charset="0"/>
-                <a:ea typeface="Calibri" pitchFamily="34" charset="-122"/>
-                <a:cs typeface="Calibri" pitchFamily="34" charset="-120"/>
+              <a:rPr lang="en-US" sz="1200" dirty="0">
+                <a:latin typeface="Times New Roman" panose="02020603050405020304" pitchFamily="18" charset="0"/>
+                <a:cs typeface="Times New Roman" panose="02020603050405020304" pitchFamily="18" charset="0"/>
               </a:rPr>
-              <a:t>🎯  Objective</a:t>
+              <a:t>The system replaces manual record keeping with a structured MySQL based database , improving:</a:t>
             </a:r>
+          </a:p>
+          <a:p>
+            <a:pPr marL="171450" indent="-171450">
+              <a:buFont typeface="Wingdings" panose="05000000000000000000" pitchFamily="2" charset="2"/>
+              <a:buChar char="§"/>
+            </a:pPr>
+            <a:r>
+              <a:rPr lang="en-US" sz="1200" dirty="0">
+                <a:latin typeface="Times New Roman" panose="02020603050405020304" pitchFamily="18" charset="0"/>
+                <a:cs typeface="Times New Roman" panose="02020603050405020304" pitchFamily="18" charset="0"/>
+              </a:rPr>
+              <a:t>Data accuracy</a:t>
+            </a:r>
+          </a:p>
+          <a:p>
+            <a:pPr marL="171450" indent="-171450">
+              <a:buFont typeface="Wingdings" panose="05000000000000000000" pitchFamily="2" charset="2"/>
+              <a:buChar char="§"/>
+            </a:pPr>
+            <a:r>
+              <a:rPr lang="en-US" sz="1200" dirty="0">
+                <a:latin typeface="Times New Roman" panose="02020603050405020304" pitchFamily="18" charset="0"/>
+                <a:cs typeface="Times New Roman" panose="02020603050405020304" pitchFamily="18" charset="0"/>
+              </a:rPr>
+              <a:t>Retrieval speed</a:t>
+            </a:r>
+          </a:p>
+          <a:p>
+            <a:pPr marL="171450" indent="-171450">
+              <a:buFont typeface="Wingdings" panose="05000000000000000000" pitchFamily="2" charset="2"/>
+              <a:buChar char="§"/>
+            </a:pPr>
+            <a:r>
+              <a:rPr lang="en-US" sz="1200" dirty="0">
+                <a:latin typeface="Times New Roman" panose="02020603050405020304" pitchFamily="18" charset="0"/>
+                <a:cs typeface="Times New Roman" panose="02020603050405020304" pitchFamily="18" charset="0"/>
+              </a:rPr>
+              <a:t>Decision making</a:t>
+            </a:r>
+          </a:p>
+          <a:p>
+            <a:pPr marL="0" indent="0">
+              <a:buNone/>
+            </a:pPr>
             <a:endParaRPr lang="en-US" sz="1300" dirty="0"/>
           </a:p>
         </p:txBody>
       </p:sp>
       <p:sp>
         <p:nvSpPr>
-          <p:cNvPr id="8" name="Text 6"/>
+          <p:cNvPr id="12" name="Text 10"/>
           <p:cNvSpPr/>
           <p:nvPr/>
         </p:nvSpPr>
         <p:spPr>
           <a:xfrm>
-            <a:off x="502920" y="1499616"/>
+            <a:off x="502920" y="2761488"/>
             <a:ext cx="4663440" cy="658368"/>
           </a:xfrm>
           <a:prstGeom prst="rect">
@@ -1994,7 +2189,7 @@
                 <a:ea typeface="Calibri" pitchFamily="34" charset="-122"/>
                 <a:cs typeface="Calibri" pitchFamily="34" charset="-120"/>
               </a:rPr>
-              <a:t>Design and implement a relational database system to manage life insurance operations including customers, policies, agents, payments, and claims.</a:t>
+              <a:t>.</a:t>
             </a:r>
             <a:endParaRPr lang="en-US" sz="1100" dirty="0"/>
           </a:p>
@@ -2002,14 +2197,14 @@
       </p:sp>
       <p:sp>
         <p:nvSpPr>
-          <p:cNvPr id="9" name="Shape 7"/>
+          <p:cNvPr id="13" name="Shape 11"/>
           <p:cNvSpPr/>
           <p:nvPr/>
         </p:nvSpPr>
         <p:spPr>
           <a:xfrm>
-            <a:off x="320040" y="2377440"/>
-            <a:ext cx="5029200" cy="1115568"/>
+            <a:off x="365760" y="3637202"/>
+            <a:ext cx="4984653" cy="1117678"/>
           </a:xfrm>
           <a:prstGeom prst="rect">
             <a:avLst/>
@@ -2031,16 +2226,23 @@
             </a:outerShdw>
           </a:effectLst>
         </p:spPr>
-      </p:sp>
-      <p:sp>
-        <p:nvSpPr>
-          <p:cNvPr id="10" name="Shape 8"/>
+        <p:txBody>
+          <a:bodyPr/>
+          <a:lstStyle/>
+          <a:p>
+            <a:endParaRPr lang="en-US" dirty="0"/>
+          </a:p>
+        </p:txBody>
+      </p:sp>
+      <p:sp>
+        <p:nvSpPr>
+          <p:cNvPr id="14" name="Shape 12"/>
           <p:cNvSpPr/>
           <p:nvPr/>
         </p:nvSpPr>
         <p:spPr>
           <a:xfrm>
-            <a:off x="320040" y="2377440"/>
+            <a:off x="320040" y="3639312"/>
             <a:ext cx="73152" cy="1115568"/>
           </a:xfrm>
           <a:prstGeom prst="rect">
@@ -2059,14 +2261,14 @@
       </p:sp>
       <p:sp>
         <p:nvSpPr>
-          <p:cNvPr id="11" name="Text 9"/>
+          <p:cNvPr id="15" name="Text 13"/>
           <p:cNvSpPr/>
           <p:nvPr/>
         </p:nvSpPr>
         <p:spPr>
           <a:xfrm>
-            <a:off x="502920" y="2468880"/>
-            <a:ext cx="4663440" cy="292608"/>
+            <a:off x="365760" y="3639312"/>
+            <a:ext cx="4846320" cy="1115568"/>
           </a:xfrm>
           <a:prstGeom prst="rect">
             <a:avLst/>
@@ -2081,30 +2283,108 @@
             <a:pPr marL="0" indent="0">
               <a:buNone/>
             </a:pPr>
+            <a:endParaRPr lang="en-US" sz="1200" dirty="0">
+              <a:latin typeface="Times New Roman" panose="02020603050405020304" pitchFamily="18" charset="0"/>
+              <a:cs typeface="Times New Roman" panose="02020603050405020304" pitchFamily="18" charset="0"/>
+            </a:endParaRPr>
+          </a:p>
+          <a:p>
+            <a:pPr marL="0" indent="0">
+              <a:buNone/>
+            </a:pPr>
+            <a:endParaRPr lang="en-US" sz="1200" dirty="0">
+              <a:latin typeface="Times New Roman" panose="02020603050405020304" pitchFamily="18" charset="0"/>
+              <a:cs typeface="Times New Roman" panose="02020603050405020304" pitchFamily="18" charset="0"/>
+            </a:endParaRPr>
+          </a:p>
+          <a:p>
+            <a:pPr marL="0" indent="0">
+              <a:buNone/>
+            </a:pPr>
             <a:r>
-              <a:rPr lang="en-US" sz="1300" b="1" dirty="0">
+              <a:rPr lang="en-US" sz="1200" dirty="0">
+                <a:latin typeface="Times New Roman" panose="02020603050405020304" pitchFamily="18" charset="0"/>
+                <a:cs typeface="Times New Roman" panose="02020603050405020304" pitchFamily="18" charset="0"/>
+              </a:rPr>
+              <a:t>The system operates in the insurance Industry, specifically life insurance</a:t>
+            </a:r>
+          </a:p>
+          <a:p>
+            <a:pPr marL="0" indent="0">
+              <a:buNone/>
+            </a:pPr>
+            <a:r>
+              <a:rPr lang="en-US" sz="1200" dirty="0">
+                <a:latin typeface="Times New Roman" panose="02020603050405020304" pitchFamily="18" charset="0"/>
+                <a:cs typeface="Times New Roman" panose="02020603050405020304" pitchFamily="18" charset="0"/>
+              </a:rPr>
+              <a:t>The main users of the system  include; customers, insurance agents and company administrators.</a:t>
+            </a:r>
+          </a:p>
+          <a:p>
+            <a:pPr marL="171450" indent="-171450">
+              <a:buFont typeface="Wingdings" panose="05000000000000000000" pitchFamily="2" charset="2"/>
+              <a:buChar char="q"/>
+            </a:pPr>
+            <a:r>
+              <a:rPr lang="en-US" sz="1200" b="1" dirty="0">
+                <a:latin typeface="Times New Roman" panose="02020603050405020304" pitchFamily="18" charset="0"/>
+                <a:cs typeface="Times New Roman" panose="02020603050405020304" pitchFamily="18" charset="0"/>
+              </a:rPr>
+              <a:t>OBJECTIVE</a:t>
+            </a:r>
+          </a:p>
+          <a:p>
+            <a:r>
+              <a:rPr lang="en-US" sz="1000" b="1" dirty="0">
                 <a:solidFill>
-                  <a:srgbClr val="0D1B3E"/>
+                  <a:srgbClr val="64748B"/>
                 </a:solidFill>
-                <a:latin typeface="Calibri" pitchFamily="34" charset="0"/>
+                <a:latin typeface="Times New Roman" panose="02020603050405020304" pitchFamily="18" charset="0"/>
                 <a:ea typeface="Calibri" pitchFamily="34" charset="-122"/>
-                <a:cs typeface="Calibri" pitchFamily="34" charset="-120"/>
+                <a:cs typeface="Times New Roman" panose="02020603050405020304" pitchFamily="18" charset="0"/>
               </a:rPr>
-              <a:t>🗄️  Platform</a:t>
+              <a:t>  To design and implement </a:t>
             </a:r>
+            <a:r>
+              <a:rPr lang="en-US" sz="1000" dirty="0">
+                <a:solidFill>
+                  <a:srgbClr val="64748B"/>
+                </a:solidFill>
+                <a:latin typeface="Times New Roman" panose="02020603050405020304" pitchFamily="18" charset="0"/>
+                <a:ea typeface="Calibri" pitchFamily="34" charset="-122"/>
+                <a:cs typeface="Times New Roman" panose="02020603050405020304" pitchFamily="18" charset="0"/>
+              </a:rPr>
+              <a:t>a relational database system to manage life insurance        operations including customers, policies, agents, payments, and claims.</a:t>
+            </a:r>
+            <a:endParaRPr lang="en-US" sz="1000" dirty="0">
+              <a:latin typeface="Times New Roman" panose="02020603050405020304" pitchFamily="18" charset="0"/>
+              <a:cs typeface="Times New Roman" panose="02020603050405020304" pitchFamily="18" charset="0"/>
+            </a:endParaRPr>
+          </a:p>
+          <a:p>
+            <a:pPr marL="0" indent="0">
+              <a:buNone/>
+            </a:pPr>
+            <a:endParaRPr lang="en-US" sz="1300" dirty="0"/>
+          </a:p>
+          <a:p>
+            <a:pPr marL="0" indent="0">
+              <a:buNone/>
+            </a:pPr>
             <a:endParaRPr lang="en-US" sz="1300" dirty="0"/>
           </a:p>
         </p:txBody>
       </p:sp>
       <p:sp>
         <p:nvSpPr>
-          <p:cNvPr id="12" name="Text 10"/>
+          <p:cNvPr id="16" name="Text 14"/>
           <p:cNvSpPr/>
           <p:nvPr/>
         </p:nvSpPr>
         <p:spPr>
           <a:xfrm>
-            <a:off x="502920" y="2761488"/>
+            <a:off x="502920" y="4023360"/>
             <a:ext cx="4663440" cy="658368"/>
           </a:xfrm>
           <a:prstGeom prst="rect">
@@ -2123,155 +2403,6 @@
               </a:lnSpc>
               <a:buNone/>
             </a:pPr>
-            <a:r>
-              <a:rPr lang="en-US" sz="1100" dirty="0">
-                <a:solidFill>
-                  <a:srgbClr val="64748B"/>
-                </a:solidFill>
-                <a:latin typeface="Calibri" pitchFamily="34" charset="0"/>
-                <a:ea typeface="Calibri" pitchFamily="34" charset="-122"/>
-                <a:cs typeface="Calibri" pitchFamily="34" charset="-120"/>
-              </a:rPr>
-              <a:t>MySQL Community Server 9.6.0, running locally. Database named 'lifeinsurance' with 5 interrelated tables enforcing referential integrity.</a:t>
-            </a:r>
-            <a:endParaRPr lang="en-US" sz="1100" dirty="0"/>
-          </a:p>
-        </p:txBody>
-      </p:sp>
-      <p:sp>
-        <p:nvSpPr>
-          <p:cNvPr id="13" name="Shape 11"/>
-          <p:cNvSpPr/>
-          <p:nvPr/>
-        </p:nvSpPr>
-        <p:spPr>
-          <a:xfrm>
-            <a:off x="320040" y="3639312"/>
-            <a:ext cx="5029200" cy="1115568"/>
-          </a:xfrm>
-          <a:prstGeom prst="rect">
-            <a:avLst/>
-          </a:prstGeom>
-          <a:solidFill>
-            <a:srgbClr val="FFFFFF"/>
-          </a:solidFill>
-          <a:ln w="12700">
-            <a:solidFill>
-              <a:srgbClr val="E2EAF0"/>
-            </a:solidFill>
-            <a:prstDash val="solid"/>
-          </a:ln>
-          <a:effectLst>
-            <a:outerShdw blurRad="101600" dist="38100" dir="8100000" algn="bl" rotWithShape="0">
-              <a:srgbClr val="000000">
-                <a:alpha val="15000"/>
-              </a:srgbClr>
-            </a:outerShdw>
-          </a:effectLst>
-        </p:spPr>
-      </p:sp>
-      <p:sp>
-        <p:nvSpPr>
-          <p:cNvPr id="14" name="Shape 12"/>
-          <p:cNvSpPr/>
-          <p:nvPr/>
-        </p:nvSpPr>
-        <p:spPr>
-          <a:xfrm>
-            <a:off x="320040" y="3639312"/>
-            <a:ext cx="73152" cy="1115568"/>
-          </a:xfrm>
-          <a:prstGeom prst="rect">
-            <a:avLst/>
-          </a:prstGeom>
-          <a:solidFill>
-            <a:srgbClr val="028090"/>
-          </a:solidFill>
-          <a:ln w="12700">
-            <a:solidFill>
-              <a:srgbClr val="028090"/>
-            </a:solidFill>
-            <a:prstDash val="solid"/>
-          </a:ln>
-        </p:spPr>
-      </p:sp>
-      <p:sp>
-        <p:nvSpPr>
-          <p:cNvPr id="15" name="Text 13"/>
-          <p:cNvSpPr/>
-          <p:nvPr/>
-        </p:nvSpPr>
-        <p:spPr>
-          <a:xfrm>
-            <a:off x="502920" y="3730752"/>
-            <a:ext cx="4663440" cy="292608"/>
-          </a:xfrm>
-          <a:prstGeom prst="rect">
-            <a:avLst/>
-          </a:prstGeom>
-          <a:noFill/>
-          <a:ln/>
-        </p:spPr>
-        <p:txBody>
-          <a:bodyPr wrap="square" rtlCol="0" anchor="ctr"/>
-          <a:lstStyle/>
-          <a:p>
-            <a:pPr marL="0" indent="0">
-              <a:buNone/>
-            </a:pPr>
-            <a:r>
-              <a:rPr lang="en-US" sz="1300" b="1" dirty="0">
-                <a:solidFill>
-                  <a:srgbClr val="0D1B3E"/>
-                </a:solidFill>
-                <a:latin typeface="Calibri" pitchFamily="34" charset="0"/>
-                <a:ea typeface="Calibri" pitchFamily="34" charset="-122"/>
-                <a:cs typeface="Calibri" pitchFamily="34" charset="-120"/>
-              </a:rPr>
-              <a:t>📐  Design Approach</a:t>
-            </a:r>
-            <a:endParaRPr lang="en-US" sz="1300" dirty="0"/>
-          </a:p>
-        </p:txBody>
-      </p:sp>
-      <p:sp>
-        <p:nvSpPr>
-          <p:cNvPr id="16" name="Text 14"/>
-          <p:cNvSpPr/>
-          <p:nvPr/>
-        </p:nvSpPr>
-        <p:spPr>
-          <a:xfrm>
-            <a:off x="502920" y="4023360"/>
-            <a:ext cx="4663440" cy="658368"/>
-          </a:xfrm>
-          <a:prstGeom prst="rect">
-            <a:avLst/>
-          </a:prstGeom>
-          <a:noFill/>
-          <a:ln/>
-        </p:spPr>
-        <p:txBody>
-          <a:bodyPr wrap="square" rtlCol="0" anchor="ctr"/>
-          <a:lstStyle/>
-          <a:p>
-            <a:pPr marL="0" indent="0">
-              <a:lnSpc>
-                <a:spcPct val="130000"/>
-              </a:lnSpc>
-              <a:buNone/>
-            </a:pPr>
-            <a:r>
-              <a:rPr lang="en-US" sz="1100" dirty="0">
-                <a:solidFill>
-                  <a:srgbClr val="64748B"/>
-                </a:solidFill>
-                <a:latin typeface="Calibri" pitchFamily="34" charset="0"/>
-                <a:ea typeface="Calibri" pitchFamily="34" charset="-122"/>
-                <a:cs typeface="Calibri" pitchFamily="34" charset="-120"/>
-              </a:rPr>
-              <a:t>Entity-Relationship modelling followed by normalisation to 3NF. Primary and foreign key constraints enforce data integrity across all tables.</a:t>
-            </a:r>
             <a:endParaRPr lang="en-US" sz="1100" dirty="0"/>
           </a:p>
         </p:txBody>
@@ -2307,6 +2438,13 @@
             </a:outerShdw>
           </a:effectLst>
         </p:spPr>
+        <p:txBody>
+          <a:bodyPr/>
+          <a:lstStyle/>
+          <a:p>
+            <a:endParaRPr lang="en-US" dirty="0"/>
+          </a:p>
+        </p:txBody>
       </p:sp>
       <p:sp>
         <p:nvSpPr>
@@ -2697,6 +2835,14 @@
   <p:clrMapOvr>
     <a:masterClrMapping/>
   </p:clrMapOvr>
+  <mc:AlternateContent xmlns:mc="http://schemas.openxmlformats.org/markup-compatibility/2006" xmlns:p14="http://schemas.microsoft.com/office/powerpoint/2010/main">
+    <mc:Choice Requires="p14">
+      <p:transition spd="slow" p14:dur="2000" advTm="91849"/>
+    </mc:Choice>
+    <mc:Fallback xmlns="">
+      <p:transition spd="slow" advTm="91849"/>
+    </mc:Fallback>
+  </mc:AlternateContent>
 </p:sld>
 </file>
 
@@ -3148,6 +3294,14 @@
   <p:clrMapOvr>
     <a:masterClrMapping/>
   </p:clrMapOvr>
+  <mc:AlternateContent xmlns:mc="http://schemas.openxmlformats.org/markup-compatibility/2006" xmlns:p14="http://schemas.microsoft.com/office/powerpoint/2010/main">
+    <mc:Choice Requires="p14">
+      <p:transition spd="slow" p14:dur="2000" advTm="146479"/>
+    </mc:Choice>
+    <mc:Fallback xmlns="">
+      <p:transition spd="slow" advTm="146479"/>
+    </mc:Fallback>
+  </mc:AlternateContent>
 </p:sld>
 </file>
 
@@ -3303,6 +3457,14 @@
   <p:clrMapOvr>
     <a:masterClrMapping/>
   </p:clrMapOvr>
+  <mc:AlternateContent xmlns:mc="http://schemas.openxmlformats.org/markup-compatibility/2006" xmlns:p14="http://schemas.microsoft.com/office/powerpoint/2010/main">
+    <mc:Choice Requires="p14">
+      <p:transition spd="slow" p14:dur="2000" advTm="81451"/>
+    </mc:Choice>
+    <mc:Fallback xmlns="">
+      <p:transition spd="slow" advTm="81451"/>
+    </mc:Fallback>
+  </mc:AlternateContent>
 </p:sld>
 </file>
 
@@ -5237,7 +5399,7 @@
           <p:nvPr>
             <p:extLst>
               <p:ext uri="{D42A27DB-BD31-4B8C-83A1-F6EECF244321}">
-                <p14:modId xmlns:p14="http://schemas.microsoft.com/office/powerpoint/2010/main" val="1579011935"/>
+                <p14:modId xmlns:p14="http://schemas.microsoft.com/office/powerpoint/2010/main" val="2449131019"/>
               </p:ext>
             </p:extLst>
           </p:nvPr>
@@ -5644,7 +5806,7 @@
                         <a:buNone/>
                       </a:pPr>
                       <a:r>
-                        <a:rPr lang="en-US" sz="900" b="1" dirty="0">
+                        <a:rPr lang="en-US" sz="900" b="1" dirty="0" err="1">
                           <a:solidFill>
                             <a:srgbClr val="FFFFFF"/>
                           </a:solidFill>
@@ -8453,6 +8615,14 @@
   <p:clrMapOvr>
     <a:masterClrMapping/>
   </p:clrMapOvr>
+  <mc:AlternateContent xmlns:mc="http://schemas.openxmlformats.org/markup-compatibility/2006" xmlns:p14="http://schemas.microsoft.com/office/powerpoint/2010/main">
+    <mc:Choice Requires="p14">
+      <p:transition spd="slow" p14:dur="2000" advTm="79823"/>
+    </mc:Choice>
+    <mc:Fallback xmlns="">
+      <p:transition spd="slow" advTm="79823"/>
+    </mc:Fallback>
+  </mc:AlternateContent>
 </p:sld>
 </file>
 
@@ -9943,7 +10113,7 @@
         <p:spPr>
           <a:xfrm>
             <a:off x="4709160" y="3703320"/>
-            <a:ext cx="4251960" cy="1261872"/>
+            <a:ext cx="4160520" cy="1207008"/>
           </a:xfrm>
           <a:prstGeom prst="rect">
             <a:avLst/>
@@ -10205,6 +10375,144 @@
   <p:clrMapOvr>
     <a:masterClrMapping/>
   </p:clrMapOvr>
+  <mc:AlternateContent xmlns:mc="http://schemas.openxmlformats.org/markup-compatibility/2006" xmlns:p14="http://schemas.microsoft.com/office/powerpoint/2010/main">
+    <mc:Choice Requires="p14">
+      <p:transition spd="slow" p14:dur="2000" advTm="123210"/>
+    </mc:Choice>
+    <mc:Fallback xmlns="">
+      <p:transition spd="slow" advTm="123210"/>
+    </mc:Fallback>
+  </mc:AlternateContent>
+</p:sld>
+</file>
+
+<file path=ppt/slides/slide7.xml><?xml version="1.0" encoding="utf-8"?>
+<p:sld xmlns:a="http://schemas.openxmlformats.org/drawingml/2006/main" xmlns:r="http://schemas.openxmlformats.org/officeDocument/2006/relationships" xmlns:p="http://schemas.openxmlformats.org/presentationml/2006/main">
+  <p:cSld>
+    <p:spTree>
+      <p:nvGrpSpPr>
+        <p:cNvPr id="1" name=""/>
+        <p:cNvGrpSpPr/>
+        <p:nvPr/>
+      </p:nvGrpSpPr>
+      <p:grpSpPr>
+        <a:xfrm>
+          <a:off x="0" y="0"/>
+          <a:ext cx="0" cy="0"/>
+          <a:chOff x="0" y="0"/>
+          <a:chExt cx="0" cy="0"/>
+        </a:xfrm>
+      </p:grpSpPr>
+      <p:sp>
+        <p:nvSpPr>
+          <p:cNvPr id="2" name="TextBox 1">
+            <a:extLst>
+              <a:ext uri="{FF2B5EF4-FFF2-40B4-BE49-F238E27FC236}">
+                <a16:creationId xmlns:a16="http://schemas.microsoft.com/office/drawing/2014/main" id="{A916BC50-B5D8-4F6A-9B31-2837D2ABEB42}"/>
+              </a:ext>
+            </a:extLst>
+          </p:cNvPr>
+          <p:cNvSpPr txBox="1"/>
+          <p:nvPr/>
+        </p:nvSpPr>
+        <p:spPr>
+          <a:xfrm>
+            <a:off x="1236133" y="287350"/>
+            <a:ext cx="5977467" cy="3262432"/>
+          </a:xfrm>
+          <a:prstGeom prst="rect">
+            <a:avLst/>
+          </a:prstGeom>
+          <a:noFill/>
+        </p:spPr>
+        <p:txBody>
+          <a:bodyPr wrap="square" rtlCol="0">
+            <a:spAutoFit/>
+          </a:bodyPr>
+          <a:lstStyle/>
+          <a:p>
+            <a:pPr algn="ctr"/>
+            <a:r>
+              <a:rPr lang="en-US" sz="4000" b="1" dirty="0"/>
+              <a:t>THANK YOU !!</a:t>
+            </a:r>
+          </a:p>
+          <a:p>
+            <a:pPr algn="ctr"/>
+            <a:endParaRPr lang="en-US" sz="4000" b="1" dirty="0"/>
+          </a:p>
+          <a:p>
+            <a:pPr algn="ctr"/>
+            <a:r>
+              <a:rPr lang="en-US" b="1" dirty="0">
+                <a:solidFill>
+                  <a:srgbClr val="009999"/>
+                </a:solidFill>
+              </a:rPr>
+              <a:t>NYANGOMA CHRISTINE</a:t>
+            </a:r>
+          </a:p>
+          <a:p>
+            <a:pPr algn="ctr"/>
+            <a:r>
+              <a:rPr lang="en-US" b="1" dirty="0">
+                <a:solidFill>
+                  <a:srgbClr val="009999"/>
+                </a:solidFill>
+              </a:rPr>
+              <a:t>2025/BCS/152/PS</a:t>
+            </a:r>
+          </a:p>
+          <a:p>
+            <a:pPr algn="ctr"/>
+            <a:endParaRPr lang="en-US" b="1" dirty="0">
+              <a:solidFill>
+                <a:srgbClr val="009999"/>
+              </a:solidFill>
+            </a:endParaRPr>
+          </a:p>
+          <a:p>
+            <a:pPr algn="ctr"/>
+            <a:r>
+              <a:rPr lang="en-US" sz="2400" dirty="0">
+                <a:solidFill>
+                  <a:srgbClr val="7030A0"/>
+                </a:solidFill>
+              </a:rPr>
+              <a:t>PRESENTING TO YOU</a:t>
+            </a:r>
+          </a:p>
+          <a:p>
+            <a:pPr algn="ctr"/>
+            <a:r>
+              <a:rPr lang="en-US" sz="2400" dirty="0">
+                <a:solidFill>
+                  <a:srgbClr val="7030A0"/>
+                </a:solidFill>
+              </a:rPr>
+              <a:t>LIFE INSURANCE DATABASE MANAGEMENT PROJECT</a:t>
+            </a:r>
+          </a:p>
+        </p:txBody>
+      </p:sp>
+    </p:spTree>
+    <p:extLst>
+      <p:ext uri="{BB962C8B-B14F-4D97-AF65-F5344CB8AC3E}">
+        <p14:creationId xmlns:p14="http://schemas.microsoft.com/office/powerpoint/2010/main" val="2593854650"/>
+      </p:ext>
+    </p:extLst>
+  </p:cSld>
+  <p:clrMapOvr>
+    <a:masterClrMapping/>
+  </p:clrMapOvr>
+  <mc:AlternateContent xmlns:mc="http://schemas.openxmlformats.org/markup-compatibility/2006" xmlns:p14="http://schemas.microsoft.com/office/powerpoint/2010/main">
+    <mc:Choice Requires="p14">
+      <p:transition spd="slow" p14:dur="2000" advTm="13163"/>
+    </mc:Choice>
+    <mc:Fallback xmlns="">
+      <p:transition spd="slow" advTm="13163"/>
+    </mc:Fallback>
+  </mc:AlternateContent>
 </p:sld>
 </file>
 
